--- a/classes/parte-8-blue-team-deteccion-y-soc/181-el-soc-moderno-roles-niveles-y-procesos/clase-181-presentacion.pptx
+++ b/classes/parte-8-blue-team-deteccion-y-soc/181-el-soc-moderno-roles-niveles-y-procesos/clase-181-presentacion.pptx
@@ -17,6 +17,11 @@
     <p:sldId id="265" r:id="rId16"/>
     <p:sldId id="266" r:id="rId17"/>
     <p:sldId id="267" r:id="rId18"/>
+    <p:sldId id="268" r:id="rId19"/>
+    <p:sldId id="269" r:id="rId20"/>
+    <p:sldId id="270" r:id="rId21"/>
+    <p:sldId id="271" r:id="rId22"/>
+    <p:sldId id="272" r:id="rId23"/>
   </p:sldIdLst>
   <p:sldSz cx="9144000" cy="6858000" type="screen4x3"/>
   <p:notesSz cx="6858000" cy="9144000"/>
@@ -3198,7 +3203,7 @@
                   <a:srgbClr val="0B3D2E"/>
                 </a:solidFill>
               </a:rPr>
-              <a:t>⚠️ Errores comunes</a:t>
+              <a:t>🧰 Herramientas y preparación</a:t>
             </a:r>
           </a:p>
         </p:txBody>
@@ -3236,67 +3241,82 @@
                   <a:srgbClr val="22282E"/>
                 </a:solidFill>
               </a:rPr>
-              <a:t>•  Todos los analistas hacen de todo — Falta separación L1/L2/L3; define niveles y criterios de escalado</a:t>
-            </a:r>
-          </a:p>
-          <a:p>
-            <a:pPr>
-              <a:spcAft>
-                <a:spcPts val="600"/>
-              </a:spcAft>
-            </a:pPr>
-            <a:r>
-              <a:rPr sz="1500">
-                <a:solidFill>
-                  <a:srgbClr val="22282E"/>
-                </a:solidFill>
-              </a:rPr>
-              <a:t>•  Métrica MTTR baja pero incidentes reincidentes — Se cierra rápido sin erradicar causa raíz; añade métrica de reincidencia</a:t>
-            </a:r>
-          </a:p>
-          <a:p>
-            <a:pPr>
-              <a:spcAft>
-                <a:spcPts val="600"/>
-              </a:spcAft>
-            </a:pPr>
-            <a:r>
-              <a:rPr sz="1500">
-                <a:solidFill>
-                  <a:srgbClr val="22282E"/>
-                </a:solidFill>
-              </a:rPr>
-              <a:t>•  Cola de alertas siempre saturada — Exceso de falsos positivos; prioriza afinar reglas antes que contratar gente</a:t>
-            </a:r>
-          </a:p>
-          <a:p>
-            <a:pPr>
-              <a:spcAft>
-                <a:spcPts val="600"/>
-              </a:spcAft>
-            </a:pPr>
-            <a:r>
-              <a:rPr sz="1500">
-                <a:solidFill>
-                  <a:srgbClr val="22282E"/>
-                </a:solidFill>
-              </a:rPr>
-              <a:t>•  Nadie es dueño de las detecciones — No hay ingeniero de detección; asigna el rol formalmente</a:t>
-            </a:r>
-          </a:p>
-          <a:p>
-            <a:pPr>
-              <a:spcAft>
-                <a:spcPts val="600"/>
-              </a:spcAft>
-            </a:pPr>
-            <a:r>
-              <a:rPr sz="1500">
-                <a:solidFill>
-                  <a:srgbClr val="22282E"/>
-                </a:solidFill>
-              </a:rPr>
-              <a:t>•  SOC 24x7 pero apagado los findes — Cobertura mal diseñada; documenta on-call o MSSP suplementario</a:t>
+              <a:t>•  No necesitas software ofensivo en esta clase; es conceptual y de diseño. Prepara:</a:t>
+            </a:r>
+          </a:p>
+          <a:p>
+            <a:pPr>
+              <a:spcAft>
+                <a:spcPts val="600"/>
+              </a:spcAft>
+            </a:pPr>
+            <a:r>
+              <a:rPr sz="1500">
+                <a:solidFill>
+                  <a:srgbClr val="22282E"/>
+                </a:solidFill>
+              </a:rPr>
+              <a:t>•  Un editor de diagramas (draw.io / Excalidraw) para modelar el flujo de alertas.</a:t>
+            </a:r>
+          </a:p>
+          <a:p>
+            <a:pPr>
+              <a:spcAft>
+                <a:spcPts val="600"/>
+              </a:spcAft>
+            </a:pPr>
+            <a:r>
+              <a:rPr sz="1500">
+                <a:solidFill>
+                  <a:srgbClr val="22282E"/>
+                </a:solidFill>
+              </a:rPr>
+              <a:t>•  Una hoja de cálculo para tu matriz RACI de roles.</a:t>
+            </a:r>
+          </a:p>
+          <a:p>
+            <a:pPr>
+              <a:spcAft>
+                <a:spcPts val="600"/>
+              </a:spcAft>
+            </a:pPr>
+            <a:r>
+              <a:rPr sz="1500">
+                <a:solidFill>
+                  <a:srgbClr val="22282E"/>
+                </a:solidFill>
+              </a:rPr>
+              <a:t>•  Acceso al catálogo de MITRE ATT&amp;CK (attack.mitre.org) para familiarizarte con el vocabulario.</a:t>
+            </a:r>
+          </a:p>
+          <a:p>
+            <a:pPr>
+              <a:spcAft>
+                <a:spcPts val="600"/>
+              </a:spcAft>
+            </a:pPr>
+            <a:r>
+              <a:rPr sz="1500">
+                <a:solidFill>
+                  <a:srgbClr val="22282E"/>
+                </a:solidFill>
+              </a:rPr>
+              <a:t>•  Opcional: revisa la documentación de un SIEM (Splunk, Elastic) para ubicar dónde encaja en el SOC.</a:t>
+            </a:r>
+          </a:p>
+          <a:p>
+            <a:pPr>
+              <a:spcAft>
+                <a:spcPts val="600"/>
+              </a:spcAft>
+            </a:pPr>
+            <a:r>
+              <a:rPr sz="1500">
+                <a:solidFill>
+                  <a:srgbClr val="22282E"/>
+                </a:solidFill>
+              </a:rPr>
+              <a:t>•  Recuerda que todo laboratorio práctico posterior se hace en un entorno propio y aislado.</a:t>
             </a:r>
           </a:p>
         </p:txBody>
@@ -3347,7 +3367,7 @@
                   <a:srgbClr val="0B3D2E"/>
                 </a:solidFill>
               </a:rPr>
-              <a:t>❓ Preguntas frecuentes</a:t>
+              <a:t>🧪 Laboratorio guiado — Diseña tu SOC en papel</a:t>
             </a:r>
           </a:p>
         </p:txBody>
@@ -3385,82 +3405,97 @@
                   <a:srgbClr val="22282E"/>
                 </a:solidFill>
               </a:rPr>
-              <a:t>•  ❓ ¿Necesito un SOC 24x7 desde el día uno?</a:t>
-            </a:r>
-          </a:p>
-          <a:p>
-            <a:pPr>
-              <a:spcAft>
-                <a:spcPts val="600"/>
-              </a:spcAft>
-            </a:pPr>
-            <a:r>
-              <a:rPr sz="1500">
-                <a:solidFill>
-                  <a:srgbClr val="22282E"/>
-                </a:solidFill>
-              </a:rPr>
-              <a:t>•  No. Empieza con 8x5 y on-call, mide tu ventana de exposición y crece según el riesgo real. Un 24x7 mal dotado es peor que un 8x5 bien afinado.</a:t>
-            </a:r>
-          </a:p>
-          <a:p>
-            <a:pPr>
-              <a:spcAft>
-                <a:spcPts val="600"/>
-              </a:spcAft>
-            </a:pPr>
-            <a:r>
-              <a:rPr sz="1500">
-                <a:solidFill>
-                  <a:srgbClr val="22282E"/>
-                </a:solidFill>
-              </a:rPr>
-              <a:t>•  ❓ ¿SIEM y SOC son lo mismo?</a:t>
-            </a:r>
-          </a:p>
-          <a:p>
-            <a:pPr>
-              <a:spcAft>
-                <a:spcPts val="600"/>
-              </a:spcAft>
-            </a:pPr>
-            <a:r>
-              <a:rPr sz="1500">
-                <a:solidFill>
-                  <a:srgbClr val="22282E"/>
-                </a:solidFill>
-              </a:rPr>
-              <a:t>•  No. El SIEM es una herramienta; el SOC es el equipo y los procesos que la usan (junto con EDR, SOAR, hunting, etc.).</a:t>
-            </a:r>
-          </a:p>
-          <a:p>
-            <a:pPr>
-              <a:spcAft>
-                <a:spcPts val="600"/>
-              </a:spcAft>
-            </a:pPr>
-            <a:r>
-              <a:rPr sz="1500">
-                <a:solidFill>
-                  <a:srgbClr val="22282E"/>
-                </a:solidFill>
-              </a:rPr>
-              <a:t>•  ❓ ¿Cuál es la diferencia entre threat hunting y monitoreo de alertas?</a:t>
-            </a:r>
-          </a:p>
-          <a:p>
-            <a:pPr>
-              <a:spcAft>
-                <a:spcPts val="600"/>
-              </a:spcAft>
-            </a:pPr>
-            <a:r>
-              <a:rPr sz="1500">
-                <a:solidFill>
-                  <a:srgbClr val="22282E"/>
-                </a:solidFill>
-              </a:rPr>
-              <a:t>•  El monitoreo reacciona a lo que una regla ya disparó; el hunting busca proactivamente lo que ninguna regla detectó, partiendo de hipótesis.</a:t>
+              <a:t>•  Ejercicio aplicado de arquitectura organizativa (no ofensivo):</a:t>
+            </a:r>
+          </a:p>
+          <a:p>
+            <a:pPr>
+              <a:spcAft>
+                <a:spcPts val="600"/>
+              </a:spcAft>
+            </a:pPr>
+            <a:r>
+              <a:rPr sz="1500">
+                <a:solidFill>
+                  <a:srgbClr val="22282E"/>
+                </a:solidFill>
+              </a:rPr>
+              <a:t>•  Define el alcance. Imagina una empresa de 500 empleados, un data center pequeño y nube (Microsoft 365 + AWS). Anota qué activos son críticos.</a:t>
+            </a:r>
+          </a:p>
+          <a:p>
+            <a:pPr>
+              <a:spcAft>
+                <a:spcPts val="600"/>
+              </a:spcAft>
+            </a:pPr>
+            <a:r>
+              <a:rPr sz="1500">
+                <a:solidFill>
+                  <a:srgbClr val="22282E"/>
+                </a:solidFill>
+              </a:rPr>
+              <a:t>•  Elige el modelo operativo. Justifica interno vs MSSP vs híbrido según presupuesto y madurez. Documenta 3 pros y 3 contras.</a:t>
+            </a:r>
+          </a:p>
+          <a:p>
+            <a:pPr>
+              <a:spcAft>
+                <a:spcPts val="600"/>
+              </a:spcAft>
+            </a:pPr>
+            <a:r>
+              <a:rPr sz="1500">
+                <a:solidFill>
+                  <a:srgbClr val="22282E"/>
+                </a:solidFill>
+              </a:rPr>
+              <a:t>•  Dibuja el flujo de una alerta. Desde que Sysmon/EDR genera un evento hasta que se cierra el ticket. Marca los puntos de escalado L1→L2→L3.</a:t>
+            </a:r>
+          </a:p>
+          <a:p>
+            <a:pPr>
+              <a:spcAft>
+                <a:spcPts val="600"/>
+              </a:spcAft>
+            </a:pPr>
+            <a:r>
+              <a:rPr sz="1500">
+                <a:solidFill>
+                  <a:srgbClr val="22282E"/>
+                </a:solidFill>
+              </a:rPr>
+              <a:t>•  Construye la matriz RACI. Para 5 actividades (triaje, hunting, creación de reglas, respuesta a incidentes, reporte a dirección) asigna Responsible/Accountable/Consulted/Informed.</a:t>
+            </a:r>
+          </a:p>
+          <a:p>
+            <a:pPr>
+              <a:spcAft>
+                <a:spcPts val="600"/>
+              </a:spcAft>
+            </a:pPr>
+            <a:r>
+              <a:rPr sz="1500">
+                <a:solidFill>
+                  <a:srgbClr val="22282E"/>
+                </a:solidFill>
+              </a:rPr>
+              <a:t>•  Define la cobertura. Decide 8x5 vs 24x7 y calcula la ventana de exposición nocturna/fin de semana. Propón una mitigación (on-call, MSSP nocturno).</a:t>
+            </a:r>
+          </a:p>
+          <a:p>
+            <a:pPr>
+              <a:spcAft>
+                <a:spcPts val="600"/>
+              </a:spcAft>
+            </a:pPr>
+            <a:r>
+              <a:rPr sz="1500">
+                <a:solidFill>
+                  <a:srgbClr val="22282E"/>
+                </a:solidFill>
+              </a:rPr>
+              <a:t>•  Selecciona la pila de herramientas. Ubica SIEM, EDR, SOAR, TIP y ticketing en el flujo del paso 3.</a:t>
             </a:r>
           </a:p>
         </p:txBody>
@@ -3511,7 +3546,7 @@
                   <a:srgbClr val="0B3D2E"/>
                 </a:solidFill>
               </a:rPr>
-              <a:t>🔗 Referencias</a:t>
+              <a:t>✍️ Ejercicios</a:t>
             </a:r>
           </a:p>
         </p:txBody>
@@ -3549,71 +3584,712 @@
                   <a:srgbClr val="22282E"/>
                 </a:solidFill>
               </a:rPr>
-              <a:t>•  Murdoch, D. Blue Team Handbook: SOC, SIEM, and Threat Hunting Use Cases.</a:t>
-            </a:r>
-          </a:p>
-          <a:p>
-            <a:pPr>
-              <a:spcAft>
-                <a:spcPts val="600"/>
-              </a:spcAft>
-            </a:pPr>
-            <a:r>
-              <a:rPr sz="1500">
-                <a:solidFill>
-                  <a:srgbClr val="22282E"/>
-                </a:solidFill>
-              </a:rPr>
-              <a:t>•  Bejtlich, R. The Practice of Network Security Monitoring. No Starch Press.</a:t>
-            </a:r>
-          </a:p>
-          <a:p>
-            <a:pPr>
-              <a:spcAft>
-                <a:spcPts val="600"/>
-              </a:spcAft>
-            </a:pPr>
-            <a:r>
-              <a:rPr sz="1500">
-                <a:solidFill>
-                  <a:srgbClr val="22282E"/>
-                </a:solidFill>
-              </a:rPr>
-              <a:t>•  MITRE ATT&amp;CK — &lt;https://attack.mitre.org/&gt;</a:t>
-            </a:r>
-          </a:p>
-          <a:p>
-            <a:pPr>
-              <a:spcAft>
-                <a:spcPts val="600"/>
-              </a:spcAft>
-            </a:pPr>
-            <a:r>
-              <a:rPr sz="1500">
-                <a:solidFill>
-                  <a:srgbClr val="22282E"/>
-                </a:solidFill>
-              </a:rPr>
-              <a:t>•  SANS, "Building a World-Class Security Operations Center" (whitepaper).</a:t>
-            </a:r>
-          </a:p>
-          <a:p>
-            <a:pPr>
-              <a:spcAft>
-                <a:spcPts val="600"/>
-              </a:spcAft>
-            </a:pPr>
-            <a:r>
-              <a:rPr sz="1500">
-                <a:solidFill>
-                  <a:srgbClr val="22282E"/>
-                </a:solidFill>
-              </a:rPr>
-              <a:t>•  NIST SP 800-61r2, Computer Security Incident Handling Guide — &lt;https://csrc.nist.gov/pubs/sp/800/61/r2/final&gt;</a:t>
-            </a:r>
-          </a:p>
-        </p:txBody>
-      </p:sp>
+              <a:t>•  Escribe la descripción de puesto (3 responsabilidades) de un analista L1 y de un ingeniero de detección.</a:t>
+            </a:r>
+          </a:p>
+          <a:p>
+            <a:pPr>
+              <a:spcAft>
+                <a:spcPts val="600"/>
+              </a:spcAft>
+            </a:pPr>
+            <a:r>
+              <a:rPr sz="1500">
+                <a:solidFill>
+                  <a:srgbClr val="22282E"/>
+                </a:solidFill>
+              </a:rPr>
+              <a:t>•  Redacta el runbook de 6 pasos para una alerta de "inicio de sesión imposible" (geografía incompatible).</a:t>
+            </a:r>
+          </a:p>
+          <a:p>
+            <a:pPr>
+              <a:spcAft>
+                <a:spcPts val="600"/>
+              </a:spcAft>
+            </a:pPr>
+            <a:r>
+              <a:rPr sz="1500">
+                <a:solidFill>
+                  <a:srgbClr val="22282E"/>
+                </a:solidFill>
+              </a:rPr>
+              <a:t>•  Compara MTTD y dwell time con un ejemplo numérico propio.</a:t>
+            </a:r>
+          </a:p>
+          <a:p>
+            <a:pPr>
+              <a:spcAft>
+                <a:spcPts val="600"/>
+              </a:spcAft>
+            </a:pPr>
+            <a:r>
+              <a:rPr sz="1500">
+                <a:solidFill>
+                  <a:srgbClr val="22282E"/>
+                </a:solidFill>
+              </a:rPr>
+              <a:t>•  Diseña el criterio de escalado L1→L2 con 3 condiciones objetivas.</a:t>
+            </a:r>
+          </a:p>
+          <a:p>
+            <a:pPr>
+              <a:spcAft>
+                <a:spcPts val="600"/>
+              </a:spcAft>
+            </a:pPr>
+            <a:r>
+              <a:rPr sz="1500">
+                <a:solidFill>
+                  <a:srgbClr val="22282E"/>
+                </a:solidFill>
+              </a:rPr>
+              <a:t>•  Argumenta cuándo un MSSP es mala idea para una organización concreta.</a:t>
+            </a:r>
+          </a:p>
+          <a:p>
+            <a:pPr>
+              <a:spcAft>
+                <a:spcPts val="600"/>
+              </a:spcAft>
+            </a:pPr>
+            <a:r>
+              <a:rPr sz="1500">
+                <a:solidFill>
+                  <a:srgbClr val="22282E"/>
+                </a:solidFill>
+              </a:rPr>
+              <a:t>•  Propón una métrica que un mal SOC podría manipular y explica cómo evitar el gaming.</a:t>
+            </a:r>
+          </a:p>
+        </p:txBody>
+      </p:sp>
+    </p:spTree>
+  </p:cSld>
+  <p:clrMapOvr>
+    <a:masterClrMapping/>
+  </p:clrMapOvr>
+</p:sld>
+</file>
+
+<file path=ppt/slides/slide13.xml><?xml version="1.0" encoding="utf-8"?>
+<p:sld xmlns:a="http://schemas.openxmlformats.org/drawingml/2006/main" xmlns:p="http://schemas.openxmlformats.org/presentationml/2006/main" xmlns:r="http://schemas.openxmlformats.org/officeDocument/2006/relationships">
+  <p:cSld>
+    <p:spTree>
+      <p:nvGrpSpPr>
+        <p:cNvPr id="1" name=""/>
+        <p:cNvGrpSpPr/>
+        <p:nvPr/>
+      </p:nvGrpSpPr>
+      <p:grpSpPr/>
+      <p:sp>
+        <p:nvSpPr>
+          <p:cNvPr id="2" name="TextBox 1"/>
+          <p:cNvSpPr txBox="1"/>
+          <p:nvPr/>
+        </p:nvSpPr>
+        <p:spPr>
+          <a:xfrm>
+            <a:off x="457200" y="320040"/>
+            <a:ext cx="8229600" cy="822960"/>
+          </a:xfrm>
+          <a:prstGeom prst="rect">
+            <a:avLst/>
+          </a:prstGeom>
+          <a:noFill/>
+        </p:spPr>
+        <p:txBody>
+          <a:bodyPr wrap="square">
+            <a:spAutoFit/>
+          </a:bodyPr>
+          <a:lstStyle/>
+          <a:p>
+            <a:r>
+              <a:rPr sz="2600" b="1">
+                <a:solidFill>
+                  <a:srgbClr val="0B3D2E"/>
+                </a:solidFill>
+              </a:rPr>
+              <a:t>📝 Reto verificable</a:t>
+            </a:r>
+          </a:p>
+        </p:txBody>
+      </p:sp>
+      <p:sp>
+        <p:nvSpPr>
+          <p:cNvPr id="3" name="TextBox 2"/>
+          <p:cNvSpPr txBox="1"/>
+          <p:nvPr/>
+        </p:nvSpPr>
+        <p:spPr>
+          <a:xfrm>
+            <a:off x="457200" y="1280160"/>
+            <a:ext cx="8229600" cy="4937760"/>
+          </a:xfrm>
+          <a:prstGeom prst="rect">
+            <a:avLst/>
+          </a:prstGeom>
+          <a:noFill/>
+        </p:spPr>
+        <p:txBody>
+          <a:bodyPr wrap="square">
+            <a:spAutoFit/>
+          </a:bodyPr>
+          <a:lstStyle/>
+          <a:p>
+            <a:pPr>
+              <a:spcAft>
+                <a:spcPts val="600"/>
+              </a:spcAft>
+            </a:pPr>
+            <a:r>
+              <a:rPr sz="1500">
+                <a:solidFill>
+                  <a:srgbClr val="22282E"/>
+                </a:solidFill>
+              </a:rPr>
+              <a:t>•  Entrega un documento de 1–2 páginas con: (a) organigrama del SOC con roles, (b) diagrama del ciclo de vida de la alerta, (c) matriz RACI, (d) 4 métricas con su fórmula. Criterio de aceptación: el…</a:t>
+            </a:r>
+          </a:p>
+        </p:txBody>
+      </p:sp>
+    </p:spTree>
+  </p:cSld>
+  <p:clrMapOvr>
+    <a:masterClrMapping/>
+  </p:clrMapOvr>
+</p:sld>
+</file>
+
+<file path=ppt/slides/slide14.xml><?xml version="1.0" encoding="utf-8"?>
+<p:sld xmlns:a="http://schemas.openxmlformats.org/drawingml/2006/main" xmlns:p="http://schemas.openxmlformats.org/presentationml/2006/main" xmlns:r="http://schemas.openxmlformats.org/officeDocument/2006/relationships">
+  <p:cSld>
+    <p:spTree>
+      <p:nvGrpSpPr>
+        <p:cNvPr id="1" name=""/>
+        <p:cNvGrpSpPr/>
+        <p:nvPr/>
+      </p:nvGrpSpPr>
+      <p:grpSpPr/>
+      <p:sp>
+        <p:nvSpPr>
+          <p:cNvPr id="2" name="TextBox 1"/>
+          <p:cNvSpPr txBox="1"/>
+          <p:nvPr/>
+        </p:nvSpPr>
+        <p:spPr>
+          <a:xfrm>
+            <a:off x="457200" y="320040"/>
+            <a:ext cx="8229600" cy="822960"/>
+          </a:xfrm>
+          <a:prstGeom prst="rect">
+            <a:avLst/>
+          </a:prstGeom>
+          <a:noFill/>
+        </p:spPr>
+        <p:txBody>
+          <a:bodyPr wrap="square">
+            <a:spAutoFit/>
+          </a:bodyPr>
+          <a:lstStyle/>
+          <a:p>
+            <a:r>
+              <a:rPr sz="2600" b="1">
+                <a:solidFill>
+                  <a:srgbClr val="0B3D2E"/>
+                </a:solidFill>
+              </a:rPr>
+              <a:t>⚠️ Errores comunes</a:t>
+            </a:r>
+          </a:p>
+        </p:txBody>
+      </p:sp>
+      <p:sp>
+        <p:nvSpPr>
+          <p:cNvPr id="3" name="TextBox 2"/>
+          <p:cNvSpPr txBox="1"/>
+          <p:nvPr/>
+        </p:nvSpPr>
+        <p:spPr>
+          <a:xfrm>
+            <a:off x="457200" y="1280160"/>
+            <a:ext cx="8229600" cy="4937760"/>
+          </a:xfrm>
+          <a:prstGeom prst="rect">
+            <a:avLst/>
+          </a:prstGeom>
+          <a:noFill/>
+        </p:spPr>
+        <p:txBody>
+          <a:bodyPr wrap="square">
+            <a:spAutoFit/>
+          </a:bodyPr>
+          <a:lstStyle/>
+          <a:p>
+            <a:pPr>
+              <a:spcAft>
+                <a:spcPts val="600"/>
+              </a:spcAft>
+            </a:pPr>
+            <a:r>
+              <a:rPr sz="1500">
+                <a:solidFill>
+                  <a:srgbClr val="22282E"/>
+                </a:solidFill>
+              </a:rPr>
+              <a:t>•  Todos los analistas hacen de todo — Falta separación L1/L2/L3; define niveles y criterios de escalado</a:t>
+            </a:r>
+          </a:p>
+          <a:p>
+            <a:pPr>
+              <a:spcAft>
+                <a:spcPts val="600"/>
+              </a:spcAft>
+            </a:pPr>
+            <a:r>
+              <a:rPr sz="1500">
+                <a:solidFill>
+                  <a:srgbClr val="22282E"/>
+                </a:solidFill>
+              </a:rPr>
+              <a:t>•  Métrica MTTR baja pero incidentes reincidentes — Se cierra rápido sin erradicar causa raíz; añade métrica de reincidencia</a:t>
+            </a:r>
+          </a:p>
+          <a:p>
+            <a:pPr>
+              <a:spcAft>
+                <a:spcPts val="600"/>
+              </a:spcAft>
+            </a:pPr>
+            <a:r>
+              <a:rPr sz="1500">
+                <a:solidFill>
+                  <a:srgbClr val="22282E"/>
+                </a:solidFill>
+              </a:rPr>
+              <a:t>•  Cola de alertas siempre saturada — Exceso de falsos positivos; prioriza afinar reglas antes que contratar gente</a:t>
+            </a:r>
+          </a:p>
+          <a:p>
+            <a:pPr>
+              <a:spcAft>
+                <a:spcPts val="600"/>
+              </a:spcAft>
+            </a:pPr>
+            <a:r>
+              <a:rPr sz="1500">
+                <a:solidFill>
+                  <a:srgbClr val="22282E"/>
+                </a:solidFill>
+              </a:rPr>
+              <a:t>•  Nadie es dueño de las detecciones — No hay ingeniero de detección; asigna el rol formalmente</a:t>
+            </a:r>
+          </a:p>
+          <a:p>
+            <a:pPr>
+              <a:spcAft>
+                <a:spcPts val="600"/>
+              </a:spcAft>
+            </a:pPr>
+            <a:r>
+              <a:rPr sz="1500">
+                <a:solidFill>
+                  <a:srgbClr val="22282E"/>
+                </a:solidFill>
+              </a:rPr>
+              <a:t>•  SOC 24x7 pero apagado los findes — Cobertura mal diseñada; documenta on-call o MSSP suplementario</a:t>
+            </a:r>
+          </a:p>
+        </p:txBody>
+      </p:sp>
+    </p:spTree>
+  </p:cSld>
+  <p:clrMapOvr>
+    <a:masterClrMapping/>
+  </p:clrMapOvr>
+</p:sld>
+</file>
+
+<file path=ppt/slides/slide15.xml><?xml version="1.0" encoding="utf-8"?>
+<p:sld xmlns:a="http://schemas.openxmlformats.org/drawingml/2006/main" xmlns:p="http://schemas.openxmlformats.org/presentationml/2006/main" xmlns:r="http://schemas.openxmlformats.org/officeDocument/2006/relationships">
+  <p:cSld>
+    <p:spTree>
+      <p:nvGrpSpPr>
+        <p:cNvPr id="1" name=""/>
+        <p:cNvGrpSpPr/>
+        <p:nvPr/>
+      </p:nvGrpSpPr>
+      <p:grpSpPr/>
+      <p:sp>
+        <p:nvSpPr>
+          <p:cNvPr id="2" name="TextBox 1"/>
+          <p:cNvSpPr txBox="1"/>
+          <p:nvPr/>
+        </p:nvSpPr>
+        <p:spPr>
+          <a:xfrm>
+            <a:off x="457200" y="320040"/>
+            <a:ext cx="8229600" cy="822960"/>
+          </a:xfrm>
+          <a:prstGeom prst="rect">
+            <a:avLst/>
+          </a:prstGeom>
+          <a:noFill/>
+        </p:spPr>
+        <p:txBody>
+          <a:bodyPr wrap="square">
+            <a:spAutoFit/>
+          </a:bodyPr>
+          <a:lstStyle/>
+          <a:p>
+            <a:r>
+              <a:rPr sz="2600" b="1">
+                <a:solidFill>
+                  <a:srgbClr val="0B3D2E"/>
+                </a:solidFill>
+              </a:rPr>
+              <a:t>❓ Preguntas frecuentes</a:t>
+            </a:r>
+          </a:p>
+        </p:txBody>
+      </p:sp>
+      <p:sp>
+        <p:nvSpPr>
+          <p:cNvPr id="3" name="TextBox 2"/>
+          <p:cNvSpPr txBox="1"/>
+          <p:nvPr/>
+        </p:nvSpPr>
+        <p:spPr>
+          <a:xfrm>
+            <a:off x="457200" y="1280160"/>
+            <a:ext cx="8229600" cy="4937760"/>
+          </a:xfrm>
+          <a:prstGeom prst="rect">
+            <a:avLst/>
+          </a:prstGeom>
+          <a:noFill/>
+        </p:spPr>
+        <p:txBody>
+          <a:bodyPr wrap="square">
+            <a:spAutoFit/>
+          </a:bodyPr>
+          <a:lstStyle/>
+          <a:p>
+            <a:pPr>
+              <a:spcAft>
+                <a:spcPts val="600"/>
+              </a:spcAft>
+            </a:pPr>
+            <a:r>
+              <a:rPr sz="1500">
+                <a:solidFill>
+                  <a:srgbClr val="22282E"/>
+                </a:solidFill>
+              </a:rPr>
+              <a:t>•  ❓ ¿Necesito un SOC 24x7 desde el día uno?</a:t>
+            </a:r>
+          </a:p>
+          <a:p>
+            <a:pPr>
+              <a:spcAft>
+                <a:spcPts val="600"/>
+              </a:spcAft>
+            </a:pPr>
+            <a:r>
+              <a:rPr sz="1500">
+                <a:solidFill>
+                  <a:srgbClr val="22282E"/>
+                </a:solidFill>
+              </a:rPr>
+              <a:t>•  No. Empieza con 8x5 y on-call, mide tu ventana de exposición y crece según el riesgo real. Un 24x7 mal dotado es peor que un 8x5 bien afinado.</a:t>
+            </a:r>
+          </a:p>
+          <a:p>
+            <a:pPr>
+              <a:spcAft>
+                <a:spcPts val="600"/>
+              </a:spcAft>
+            </a:pPr>
+            <a:r>
+              <a:rPr sz="1500">
+                <a:solidFill>
+                  <a:srgbClr val="22282E"/>
+                </a:solidFill>
+              </a:rPr>
+              <a:t>•  ❓ ¿SIEM y SOC son lo mismo?</a:t>
+            </a:r>
+          </a:p>
+          <a:p>
+            <a:pPr>
+              <a:spcAft>
+                <a:spcPts val="600"/>
+              </a:spcAft>
+            </a:pPr>
+            <a:r>
+              <a:rPr sz="1500">
+                <a:solidFill>
+                  <a:srgbClr val="22282E"/>
+                </a:solidFill>
+              </a:rPr>
+              <a:t>•  No. El SIEM es una herramienta; el SOC es el equipo y los procesos que la usan (junto con EDR, SOAR, hunting, etc.).</a:t>
+            </a:r>
+          </a:p>
+          <a:p>
+            <a:pPr>
+              <a:spcAft>
+                <a:spcPts val="600"/>
+              </a:spcAft>
+            </a:pPr>
+            <a:r>
+              <a:rPr sz="1500">
+                <a:solidFill>
+                  <a:srgbClr val="22282E"/>
+                </a:solidFill>
+              </a:rPr>
+              <a:t>•  ❓ ¿Cuál es la diferencia entre threat hunting y monitoreo de alertas?</a:t>
+            </a:r>
+          </a:p>
+          <a:p>
+            <a:pPr>
+              <a:spcAft>
+                <a:spcPts val="600"/>
+              </a:spcAft>
+            </a:pPr>
+            <a:r>
+              <a:rPr sz="1500">
+                <a:solidFill>
+                  <a:srgbClr val="22282E"/>
+                </a:solidFill>
+              </a:rPr>
+              <a:t>•  El monitoreo reacciona a lo que una regla ya disparó; el hunting busca proactivamente lo que ninguna regla detectó, partiendo de hipótesis.</a:t>
+            </a:r>
+          </a:p>
+        </p:txBody>
+      </p:sp>
+    </p:spTree>
+  </p:cSld>
+  <p:clrMapOvr>
+    <a:masterClrMapping/>
+  </p:clrMapOvr>
+</p:sld>
+</file>
+
+<file path=ppt/slides/slide16.xml><?xml version="1.0" encoding="utf-8"?>
+<p:sld xmlns:a="http://schemas.openxmlformats.org/drawingml/2006/main" xmlns:p="http://schemas.openxmlformats.org/presentationml/2006/main" xmlns:r="http://schemas.openxmlformats.org/officeDocument/2006/relationships">
+  <p:cSld>
+    <p:spTree>
+      <p:nvGrpSpPr>
+        <p:cNvPr id="1" name=""/>
+        <p:cNvGrpSpPr/>
+        <p:nvPr/>
+      </p:nvGrpSpPr>
+      <p:grpSpPr/>
+      <p:sp>
+        <p:nvSpPr>
+          <p:cNvPr id="2" name="TextBox 1"/>
+          <p:cNvSpPr txBox="1"/>
+          <p:nvPr/>
+        </p:nvSpPr>
+        <p:spPr>
+          <a:xfrm>
+            <a:off x="457200" y="320040"/>
+            <a:ext cx="8229600" cy="822960"/>
+          </a:xfrm>
+          <a:prstGeom prst="rect">
+            <a:avLst/>
+          </a:prstGeom>
+          <a:noFill/>
+        </p:spPr>
+        <p:txBody>
+          <a:bodyPr wrap="square">
+            <a:spAutoFit/>
+          </a:bodyPr>
+          <a:lstStyle/>
+          <a:p>
+            <a:r>
+              <a:rPr sz="2600" b="1">
+                <a:solidFill>
+                  <a:srgbClr val="0B3D2E"/>
+                </a:solidFill>
+              </a:rPr>
+              <a:t>🔗 Referencias verificables y alcance</a:t>
+            </a:r>
+          </a:p>
+        </p:txBody>
+      </p:sp>
+      <p:sp>
+        <p:nvSpPr>
+          <p:cNvPr id="3" name="TextBox 2"/>
+          <p:cNvSpPr txBox="1"/>
+          <p:nvPr/>
+        </p:nvSpPr>
+        <p:spPr>
+          <a:xfrm>
+            <a:off x="457200" y="1280160"/>
+            <a:ext cx="8229600" cy="4937760"/>
+          </a:xfrm>
+          <a:prstGeom prst="rect">
+            <a:avLst/>
+          </a:prstGeom>
+          <a:noFill/>
+        </p:spPr>
+        <p:txBody>
+          <a:bodyPr wrap="square">
+            <a:spAutoFit/>
+          </a:bodyPr>
+          <a:lstStyle/>
+          <a:p>
+            <a:pPr>
+              <a:spcAft>
+                <a:spcPts val="600"/>
+              </a:spcAft>
+            </a:pPr>
+            <a:r>
+              <a:rPr sz="1500">
+                <a:solidFill>
+                  <a:srgbClr val="22282E"/>
+                </a:solidFill>
+              </a:rPr>
+              <a:t>•  NIST SP 800-61 Rev. 3, Incident Response Recommendations and Considerations for Cybersecurity Risk Management: fuente primaria para integrar preparación, detección, respuesta, recuperación y mejora…</a:t>
+            </a:r>
+          </a:p>
+          <a:p>
+            <a:pPr>
+              <a:spcAft>
+                <a:spcPts val="600"/>
+              </a:spcAft>
+            </a:pPr>
+            <a:r>
+              <a:rPr sz="1500">
+                <a:solidFill>
+                  <a:srgbClr val="22282E"/>
+                </a:solidFill>
+              </a:rPr>
+              <a:t>•  NIST CSF 2.0: fuente primaria para las funciones Govern, Identify, Protect, Detect, Respond y Recover y su relación dentro de un programa — &lt;https://doi.org/10.6028/NIST.CSWP.29&gt;</a:t>
+            </a:r>
+          </a:p>
+          <a:p>
+            <a:pPr>
+              <a:spcAft>
+                <a:spcPts val="600"/>
+              </a:spcAft>
+            </a:pPr>
+            <a:r>
+              <a:rPr sz="1500">
+                <a:solidFill>
+                  <a:srgbClr val="22282E"/>
+                </a:solidFill>
+              </a:rPr>
+              <a:t>•  MITRE ATT&amp;CK: base de conocimiento mantenida por MITRE para describir tácticas y técnicas; se usa como vocabulario de comportamiento, no como organigrama de un SOC — &lt;https://attack.mitre.org/&gt;</a:t>
+            </a:r>
+          </a:p>
+          <a:p>
+            <a:pPr>
+              <a:spcAft>
+                <a:spcPts val="600"/>
+              </a:spcAft>
+            </a:pPr>
+            <a:r>
+              <a:rPr sz="1500">
+                <a:solidFill>
+                  <a:srgbClr val="22282E"/>
+                </a:solidFill>
+              </a:rPr>
+              <a:t>•  Murdoch, D. Blue Team Handbook: SOC, SIEM, and Threat Hunting Use Cases: bibliografía profesional complementaria para casos de uso y operación.</a:t>
+            </a:r>
+          </a:p>
+          <a:p>
+            <a:pPr>
+              <a:spcAft>
+                <a:spcPts val="600"/>
+              </a:spcAft>
+            </a:pPr>
+            <a:r>
+              <a:rPr sz="1500">
+                <a:solidFill>
+                  <a:srgbClr val="22282E"/>
+                </a:solidFill>
+              </a:rPr>
+              <a:t>•  Bejtlich, R. The Practice of Network Security Monitoring. No Starch Press: bibliografía complementaria sobre monitoreo e investigación basada en evidencia de red.</a:t>
+            </a:r>
+          </a:p>
+        </p:txBody>
+      </p:sp>
+    </p:spTree>
+  </p:cSld>
+  <p:clrMapOvr>
+    <a:masterClrMapping/>
+  </p:clrMapOvr>
+</p:sld>
+</file>
+
+<file path=ppt/slides/slide17.xml><?xml version="1.0" encoding="utf-8"?>
+<p:sld xmlns:a="http://schemas.openxmlformats.org/drawingml/2006/main" xmlns:p="http://schemas.openxmlformats.org/presentationml/2006/main" xmlns:r="http://schemas.openxmlformats.org/officeDocument/2006/relationships">
+  <p:cSld>
+    <p:spTree>
+      <p:nvGrpSpPr>
+        <p:cNvPr id="1" name=""/>
+        <p:cNvGrpSpPr/>
+        <p:nvPr/>
+      </p:nvGrpSpPr>
+      <p:grpSpPr/>
+      <p:sp>
+        <p:nvSpPr>
+          <p:cNvPr id="2" name="TextBox 1"/>
+          <p:cNvSpPr txBox="1"/>
+          <p:nvPr/>
+        </p:nvSpPr>
+        <p:spPr>
+          <a:xfrm>
+            <a:off x="457200" y="274320"/>
+            <a:ext cx="8229600" cy="640080"/>
+          </a:xfrm>
+          <a:prstGeom prst="rect">
+            <a:avLst/>
+          </a:prstGeom>
+          <a:noFill/>
+        </p:spPr>
+        <p:txBody>
+          <a:bodyPr wrap="square">
+            <a:spAutoFit/>
+          </a:bodyPr>
+          <a:lstStyle/>
+          <a:p>
+            <a:r>
+              <a:rPr sz="2200" b="1">
+                <a:solidFill>
+                  <a:srgbClr val="0B3D2E"/>
+                </a:solidFill>
+              </a:rPr>
+              <a:t>Diagrama de la clase</a:t>
+            </a:r>
+          </a:p>
+        </p:txBody>
+      </p:sp>
+      <p:pic>
+        <p:nvPicPr>
+          <p:cNvPr id="3" name="Picture 2" descr="e209dfde589a0787.png"/>
+          <p:cNvPicPr>
+            <a:picLocks noChangeAspect="1"/>
+          </p:cNvPicPr>
+          <p:nvPr/>
+        </p:nvPicPr>
+        <p:blipFill>
+          <a:blip r:embed="rId2"/>
+          <a:stretch>
+            <a:fillRect/>
+          </a:stretch>
+        </p:blipFill>
+        <p:spPr>
+          <a:xfrm>
+            <a:off x="457200" y="3090672"/>
+            <a:ext cx="8229600" cy="1316736"/>
+          </a:xfrm>
+          <a:prstGeom prst="rect">
+            <a:avLst/>
+          </a:prstGeom>
+        </p:spPr>
+      </p:pic>
     </p:spTree>
   </p:cSld>
   <p:clrMapOvr>
@@ -3698,7 +4374,7 @@
                   <a:srgbClr val="22282E"/>
                 </a:solidFill>
               </a:rPr>
-              <a:t>•  Entender qué es un Security Operations Center (SOC) moderno: cómo se organiza en niveles (L1/L2/L3), qué roles lo componen, cómo fluye una alerta desde que se genera hasta que se cierra, y qué modelos operativos existen (interno, MSSP, híbrido). Al final tendrás un mapa mental del ecosistema defensivo sobre el que se apoya toda la Parte 8.</a:t>
+              <a:t>•  Entender qué es un Security Operations Center (SOC) moderno: cómo se organiza en niveles (L1/L2/L3), qué roles lo componen, cómo fluye una alerta desde que se genera hasta que se cierra, y qué…</a:t>
             </a:r>
           </a:p>
         </p:txBody>
@@ -4092,7 +4768,7 @@
                   <a:srgbClr val="0B3D2E"/>
                 </a:solidFill>
               </a:rPr>
-              <a:t>📖 Definiciones y características</a:t>
+              <a:t>🧠 Explicación en profundidad</a:t>
             </a:r>
           </a:p>
         </p:txBody>
@@ -4130,97 +4806,97 @@
                   <a:srgbClr val="22282E"/>
                 </a:solidFill>
               </a:rPr>
-              <a:t>•  SOC (Security Operations Center): equipo y plataforma que monitorea, detecta, investiga y responde a amenazas de forma continua. Característica clave: opera con procesos definidos, no ad hoc.</a:t>
-            </a:r>
-          </a:p>
-          <a:p>
-            <a:pPr>
-              <a:spcAft>
-                <a:spcPts val="600"/>
-              </a:spcAft>
-            </a:pPr>
-            <a:r>
-              <a:rPr sz="1500">
-                <a:solidFill>
-                  <a:srgbClr val="22282E"/>
-                </a:solidFill>
-              </a:rPr>
-              <a:t>•  Analista L1 (triage): primer filtro; clasifica alertas, descarta falsos positivos evidentes y escala lo que merece investigación. Característica: alto volumen, decisiones rápidas.</a:t>
-            </a:r>
-          </a:p>
-          <a:p>
-            <a:pPr>
-              <a:spcAft>
-                <a:spcPts val="600"/>
-              </a:spcAft>
-            </a:pPr>
-            <a:r>
-              <a:rPr sz="1500">
-                <a:solidFill>
-                  <a:srgbClr val="22282E"/>
-                </a:solidFill>
-              </a:rPr>
-              <a:t>•  Analista L2 (investigación): profundiza, correlaciona múltiples fuentes y determina alcance. Característica: pivota entre telemetría de red, endpoint e identidad.</a:t>
-            </a:r>
-          </a:p>
-          <a:p>
-            <a:pPr>
-              <a:spcAft>
-                <a:spcPts val="600"/>
-              </a:spcAft>
-            </a:pPr>
-            <a:r>
-              <a:rPr sz="1500">
-                <a:solidFill>
-                  <a:srgbClr val="22282E"/>
-                </a:solidFill>
-              </a:rPr>
-              <a:t>•  L3 / Threat Hunter / Ingeniero de detección: caza proactiva, crea y afina detecciones, lidera incidentes complejos. Característica: trabaja por hipótesis, no solo por alertas.</a:t>
-            </a:r>
-          </a:p>
-          <a:p>
-            <a:pPr>
-              <a:spcAft>
-                <a:spcPts val="600"/>
-              </a:spcAft>
-            </a:pPr>
-            <a:r>
-              <a:rPr sz="1500">
-                <a:solidFill>
-                  <a:srgbClr val="22282E"/>
-                </a:solidFill>
-              </a:rPr>
-              <a:t>•  MTTD (Mean Time To Detect): tiempo medio desde el compromiso hasta la detección. Cuanto menor, menos daño.</a:t>
-            </a:r>
-          </a:p>
-          <a:p>
-            <a:pPr>
-              <a:spcAft>
-                <a:spcPts val="600"/>
-              </a:spcAft>
-            </a:pPr>
-            <a:r>
-              <a:rPr sz="1500">
-                <a:solidFill>
-                  <a:srgbClr val="22282E"/>
-                </a:solidFill>
-              </a:rPr>
-              <a:t>•  MTTR (Mean Time To Respond): tiempo medio hasta contener/erradicar. Mide la eficacia de la respuesta.</a:t>
-            </a:r>
-          </a:p>
-          <a:p>
-            <a:pPr>
-              <a:spcAft>
-                <a:spcPts val="600"/>
-              </a:spcAft>
-            </a:pPr>
-            <a:r>
-              <a:rPr sz="1500">
-                <a:solidFill>
-                  <a:srgbClr val="22282E"/>
-                </a:solidFill>
-              </a:rPr>
-              <a:t>•  Dwell time: tiempo que el atacante permanece sin ser detectado. Métrica reina del blue team.</a:t>
+              <a:t>•  Un SOC no es una sala llena de pantallas: es una capacidad operativa que convierte señales técnicas en decisiones de riesgo. Personas, procesos, datos y herramientas deben funcionar como un sistema.…</a:t>
+            </a:r>
+          </a:p>
+          <a:p>
+            <a:pPr>
+              <a:spcAft>
+                <a:spcPts val="600"/>
+              </a:spcAft>
+            </a:pPr>
+            <a:r>
+              <a:rPr sz="1500">
+                <a:solidFill>
+                  <a:srgbClr val="22282E"/>
+                </a:solidFill>
+              </a:rPr>
+              <a:t>•  Los niveles L1/L2/L3 son un modelo frecuente, no una norma universal. Su utilidad está en separar decisiones: L1 valida calidad y contexto mínimo; L2 determina alcance e impacto; L3 resuelve…</a:t>
+            </a:r>
+          </a:p>
+          <a:p>
+            <a:pPr>
+              <a:spcAft>
+                <a:spcPts val="600"/>
+              </a:spcAft>
+            </a:pPr>
+            <a:r>
+              <a:rPr sz="1500">
+                <a:solidFill>
+                  <a:srgbClr val="22282E"/>
+                </a:solidFill>
+              </a:rPr>
+              <a:t>•  El cierre es una producción de conocimiento: debe registrar disposición, evidencia, causa de falsos positivos y acciones posteriores. Las métricas necesitan puntos de inicio y fin explícitos; «MTTR»…</a:t>
+            </a:r>
+          </a:p>
+          <a:p>
+            <a:pPr>
+              <a:spcAft>
+                <a:spcPts val="600"/>
+              </a:spcAft>
+            </a:pPr>
+            <a:r>
+              <a:rPr sz="1500">
+                <a:solidFill>
+                  <a:srgbClr val="22282E"/>
+                </a:solidFill>
+              </a:rPr>
+              <a:t>•  Supongamos que una regla informa que Word inició PowerShell. El L1 no debería limitarse a leer el nombre de ambos procesos. Primero confirma que el evento corresponde al host y periodo correctos…</a:t>
+            </a:r>
+          </a:p>
+          <a:p>
+            <a:pPr>
+              <a:spcAft>
+                <a:spcPts val="600"/>
+              </a:spcAft>
+            </a:pPr>
+            <a:r>
+              <a:rPr sz="1500">
+                <a:solidFill>
+                  <a:srgbClr val="22282E"/>
+                </a:solidFill>
+              </a:rPr>
+              <a:t>•  El L2 recibe el caso con ese contexto y formula preguntas de alcance: ¿ocurrió en más equipos?, ¿la cuenta inició sesiones anómalas?, ¿aparecieron archivos o persistencia?, ¿hay comunicación…</a:t>
+            </a:r>
+          </a:p>
+          <a:p>
+            <a:pPr>
+              <a:spcAft>
+                <a:spcPts val="600"/>
+              </a:spcAft>
+            </a:pPr>
+            <a:r>
+              <a:rPr sz="1500">
+                <a:solidFill>
+                  <a:srgbClr val="22282E"/>
+                </a:solidFill>
+              </a:rPr>
+              <a:t>•  El diagrama debe leerse como un circuito, no como una cinta transportadora. La flecha de «lecciones» hacia «analítica» obliga a revisar la regla; también puede revelar que falta telemetría, que un…</a:t>
+            </a:r>
+          </a:p>
+          <a:p>
+            <a:pPr>
+              <a:spcAft>
+                <a:spcPts val="600"/>
+              </a:spcAft>
+            </a:pPr>
+            <a:r>
+              <a:rPr sz="1500">
+                <a:solidFill>
+                  <a:srgbClr val="22282E"/>
+                </a:solidFill>
+              </a:rPr>
+              <a:t>•  El modelo L1/L2/L3 sirve para ordenar la carga, pero puede volverse contraproducente si crea silos. El analista que hace triaje conoce primero los patrones de ruido; esa información debe llegar al…</a:t>
             </a:r>
           </a:p>
         </p:txBody>
@@ -4271,7 +4947,7 @@
                   <a:srgbClr val="0B3D2E"/>
                 </a:solidFill>
               </a:rPr>
-              <a:t>🧰 Herramientas y preparación</a:t>
+              <a:t>📔 Glosario</a:t>
             </a:r>
           </a:p>
         </p:txBody>
@@ -4309,82 +4985,97 @@
                   <a:srgbClr val="22282E"/>
                 </a:solidFill>
               </a:rPr>
-              <a:t>•  No necesitas software ofensivo en esta clase; es conceptual y de diseño. Prepara:</a:t>
-            </a:r>
-          </a:p>
-          <a:p>
-            <a:pPr>
-              <a:spcAft>
-                <a:spcPts val="600"/>
-              </a:spcAft>
-            </a:pPr>
-            <a:r>
-              <a:rPr sz="1500">
-                <a:solidFill>
-                  <a:srgbClr val="22282E"/>
-                </a:solidFill>
-              </a:rPr>
-              <a:t>•  Un editor de diagramas (draw.io / Excalidraw) para modelar el flujo de alertas.</a:t>
-            </a:r>
-          </a:p>
-          <a:p>
-            <a:pPr>
-              <a:spcAft>
-                <a:spcPts val="600"/>
-              </a:spcAft>
-            </a:pPr>
-            <a:r>
-              <a:rPr sz="1500">
-                <a:solidFill>
-                  <a:srgbClr val="22282E"/>
-                </a:solidFill>
-              </a:rPr>
-              <a:t>•  Una hoja de cálculo para tu matriz RACI de roles.</a:t>
-            </a:r>
-          </a:p>
-          <a:p>
-            <a:pPr>
-              <a:spcAft>
-                <a:spcPts val="600"/>
-              </a:spcAft>
-            </a:pPr>
-            <a:r>
-              <a:rPr sz="1500">
-                <a:solidFill>
-                  <a:srgbClr val="22282E"/>
-                </a:solidFill>
-              </a:rPr>
-              <a:t>•  Acceso al catálogo de MITRE ATT&amp;CK (attack.mitre.org) para familiarizarte con el vocabulario.</a:t>
-            </a:r>
-          </a:p>
-          <a:p>
-            <a:pPr>
-              <a:spcAft>
-                <a:spcPts val="600"/>
-              </a:spcAft>
-            </a:pPr>
-            <a:r>
-              <a:rPr sz="1500">
-                <a:solidFill>
-                  <a:srgbClr val="22282E"/>
-                </a:solidFill>
-              </a:rPr>
-              <a:t>•  Opcional: revisa la documentación de un SIEM (Splunk, Elastic) para ubicar dónde encaja en el SOC.</a:t>
-            </a:r>
-          </a:p>
-          <a:p>
-            <a:pPr>
-              <a:spcAft>
-                <a:spcPts val="600"/>
-              </a:spcAft>
-            </a:pPr>
-            <a:r>
-              <a:rPr sz="1500">
-                <a:solidFill>
-                  <a:srgbClr val="22282E"/>
-                </a:solidFill>
-              </a:rPr>
-              <a:t>•  Recuerda que todo laboratorio práctico posterior se hace en un entorno propio y aislado.</a:t>
+              <a:t>•  Triaje: clasificación inicial basada en validez, severidad y contexto.</a:t>
+            </a:r>
+          </a:p>
+          <a:p>
+            <a:pPr>
+              <a:spcAft>
+                <a:spcPts val="600"/>
+              </a:spcAft>
+            </a:pPr>
+            <a:r>
+              <a:rPr sz="1500">
+                <a:solidFill>
+                  <a:srgbClr val="22282E"/>
+                </a:solidFill>
+              </a:rPr>
+              <a:t>•  Escalada: transferencia documentada de responsabilidad o especialidad.</a:t>
+            </a:r>
+          </a:p>
+          <a:p>
+            <a:pPr>
+              <a:spcAft>
+                <a:spcPts val="600"/>
+              </a:spcAft>
+            </a:pPr>
+            <a:r>
+              <a:rPr sz="1500">
+                <a:solidFill>
+                  <a:srgbClr val="22282E"/>
+                </a:solidFill>
+              </a:rPr>
+              <a:t>•  Caso: contenedor de evidencias y decisiones; no equivale automáticamente a incidente.</a:t>
+            </a:r>
+          </a:p>
+          <a:p>
+            <a:pPr>
+              <a:spcAft>
+                <a:spcPts val="600"/>
+              </a:spcAft>
+            </a:pPr>
+            <a:r>
+              <a:rPr sz="1500">
+                <a:solidFill>
+                  <a:srgbClr val="22282E"/>
+                </a:solidFill>
+              </a:rPr>
+              <a:t>•  Runbook: instrucciones repetibles para una tarea concreta.</a:t>
+            </a:r>
+          </a:p>
+          <a:p>
+            <a:pPr>
+              <a:spcAft>
+                <a:spcPts val="600"/>
+              </a:spcAft>
+            </a:pPr>
+            <a:r>
+              <a:rPr sz="1500">
+                <a:solidFill>
+                  <a:srgbClr val="22282E"/>
+                </a:solidFill>
+              </a:rPr>
+              <a:t>•  Playbook: coordinación de decisiones, tareas y responsables ante un escenario.</a:t>
+            </a:r>
+          </a:p>
+          <a:p>
+            <a:pPr>
+              <a:spcAft>
+                <a:spcPts val="600"/>
+              </a:spcAft>
+            </a:pPr>
+            <a:r>
+              <a:rPr sz="1500">
+                <a:solidFill>
+                  <a:srgbClr val="22282E"/>
+                </a:solidFill>
+              </a:rPr>
+              <a:t>•  RACI: matriz de responsable, aprobador, consultado e informado.</a:t>
+            </a:r>
+          </a:p>
+          <a:p>
+            <a:pPr>
+              <a:spcAft>
+                <a:spcPts val="600"/>
+              </a:spcAft>
+            </a:pPr>
+            <a:r>
+              <a:rPr sz="1500">
+                <a:solidFill>
+                  <a:srgbClr val="22282E"/>
+                </a:solidFill>
+              </a:rPr>
+              <a:t>•  Criterio de cierre: condiciones verificables para terminar un caso.</a:t>
             </a:r>
           </a:p>
         </p:txBody>
@@ -4435,7 +5126,7 @@
                   <a:srgbClr val="0B3D2E"/>
                 </a:solidFill>
               </a:rPr>
-              <a:t>🧪 Laboratorio guiado — Diseña tu SOC en papel</a:t>
+              <a:t>📖 Definiciones y características</a:t>
             </a:r>
           </a:p>
         </p:txBody>
@@ -4473,97 +5164,97 @@
                   <a:srgbClr val="22282E"/>
                 </a:solidFill>
               </a:rPr>
-              <a:t>•  Ejercicio aplicado de arquitectura organizativa (no ofensivo):</a:t>
-            </a:r>
-          </a:p>
-          <a:p>
-            <a:pPr>
-              <a:spcAft>
-                <a:spcPts val="600"/>
-              </a:spcAft>
-            </a:pPr>
-            <a:r>
-              <a:rPr sz="1500">
-                <a:solidFill>
-                  <a:srgbClr val="22282E"/>
-                </a:solidFill>
-              </a:rPr>
-              <a:t>•  Define el alcance. Imagina una empresa de 500 empleados, un data center pequeño y nube (Microsoft 365 + AWS). Anota qué activos son críticos.</a:t>
-            </a:r>
-          </a:p>
-          <a:p>
-            <a:pPr>
-              <a:spcAft>
-                <a:spcPts val="600"/>
-              </a:spcAft>
-            </a:pPr>
-            <a:r>
-              <a:rPr sz="1500">
-                <a:solidFill>
-                  <a:srgbClr val="22282E"/>
-                </a:solidFill>
-              </a:rPr>
-              <a:t>•  Elige el modelo operativo. Justifica interno vs MSSP vs híbrido según presupuesto y madurez. Documenta 3 pros y 3 contras.</a:t>
-            </a:r>
-          </a:p>
-          <a:p>
-            <a:pPr>
-              <a:spcAft>
-                <a:spcPts val="600"/>
-              </a:spcAft>
-            </a:pPr>
-            <a:r>
-              <a:rPr sz="1500">
-                <a:solidFill>
-                  <a:srgbClr val="22282E"/>
-                </a:solidFill>
-              </a:rPr>
-              <a:t>•  Dibuja el flujo de una alerta. Desde que Sysmon/EDR genera un evento hasta que se cierra el ticket. Marca los puntos de escalado L1→L2→L3.</a:t>
-            </a:r>
-          </a:p>
-          <a:p>
-            <a:pPr>
-              <a:spcAft>
-                <a:spcPts val="600"/>
-              </a:spcAft>
-            </a:pPr>
-            <a:r>
-              <a:rPr sz="1500">
-                <a:solidFill>
-                  <a:srgbClr val="22282E"/>
-                </a:solidFill>
-              </a:rPr>
-              <a:t>•  Construye la matriz RACI. Para 5 actividades (triaje, hunting, creación de reglas, respuesta a incidentes, reporte a dirección) asigna Responsible/Accountable/Consulted/Informed.</a:t>
-            </a:r>
-          </a:p>
-          <a:p>
-            <a:pPr>
-              <a:spcAft>
-                <a:spcPts val="600"/>
-              </a:spcAft>
-            </a:pPr>
-            <a:r>
-              <a:rPr sz="1500">
-                <a:solidFill>
-                  <a:srgbClr val="22282E"/>
-                </a:solidFill>
-              </a:rPr>
-              <a:t>•  Define la cobertura. Decide 8x5 vs 24x7 y calcula la ventana de exposición nocturna/fin de semana. Propón una mitigación (on-call, MSSP nocturno).</a:t>
-            </a:r>
-          </a:p>
-          <a:p>
-            <a:pPr>
-              <a:spcAft>
-                <a:spcPts val="600"/>
-              </a:spcAft>
-            </a:pPr>
-            <a:r>
-              <a:rPr sz="1500">
-                <a:solidFill>
-                  <a:srgbClr val="22282E"/>
-                </a:solidFill>
-              </a:rPr>
-              <a:t>•  Selecciona la pila de herramientas. Ubica SIEM, EDR, SOAR, TIP y ticketing en el flujo del paso 3.</a:t>
+              <a:t>•  SOC (Security Operations Center): equipo y plataforma que monitorea, detecta, investiga y responde a amenazas de forma continua. Característica clave: opera con procesos definidos, no ad hoc.</a:t>
+            </a:r>
+          </a:p>
+          <a:p>
+            <a:pPr>
+              <a:spcAft>
+                <a:spcPts val="600"/>
+              </a:spcAft>
+            </a:pPr>
+            <a:r>
+              <a:rPr sz="1500">
+                <a:solidFill>
+                  <a:srgbClr val="22282E"/>
+                </a:solidFill>
+              </a:rPr>
+              <a:t>•  Analista L1 (triage): primer filtro; clasifica alertas, descarta falsos positivos evidentes y escala lo que merece investigación. Característica: alto volumen, decisiones rápidas.</a:t>
+            </a:r>
+          </a:p>
+          <a:p>
+            <a:pPr>
+              <a:spcAft>
+                <a:spcPts val="600"/>
+              </a:spcAft>
+            </a:pPr>
+            <a:r>
+              <a:rPr sz="1500">
+                <a:solidFill>
+                  <a:srgbClr val="22282E"/>
+                </a:solidFill>
+              </a:rPr>
+              <a:t>•  Analista L2 (investigación): profundiza, correlaciona múltiples fuentes y determina alcance. Característica: pivota entre telemetría de red, endpoint e identidad.</a:t>
+            </a:r>
+          </a:p>
+          <a:p>
+            <a:pPr>
+              <a:spcAft>
+                <a:spcPts val="600"/>
+              </a:spcAft>
+            </a:pPr>
+            <a:r>
+              <a:rPr sz="1500">
+                <a:solidFill>
+                  <a:srgbClr val="22282E"/>
+                </a:solidFill>
+              </a:rPr>
+              <a:t>•  L3 / Threat Hunter / Ingeniero de detección: caza proactiva, crea y afina detecciones, lidera incidentes complejos. Característica: trabaja por hipótesis, no solo por alertas.</a:t>
+            </a:r>
+          </a:p>
+          <a:p>
+            <a:pPr>
+              <a:spcAft>
+                <a:spcPts val="600"/>
+              </a:spcAft>
+            </a:pPr>
+            <a:r>
+              <a:rPr sz="1500">
+                <a:solidFill>
+                  <a:srgbClr val="22282E"/>
+                </a:solidFill>
+              </a:rPr>
+              <a:t>•  MTTD (Mean Time To Detect): media de un intervalo de detección definido sobre una población concreta. Solo es interpretable si se documentan inicio, fin y casos incluidos.</a:t>
+            </a:r>
+          </a:p>
+          <a:p>
+            <a:pPr>
+              <a:spcAft>
+                <a:spcPts val="600"/>
+              </a:spcAft>
+            </a:pPr>
+            <a:r>
+              <a:rPr sz="1500">
+                <a:solidFill>
+                  <a:srgbClr val="22282E"/>
+                </a:solidFill>
+              </a:rPr>
+              <a:t>•  MTTR: sigla ambigua que puede referirse a reconocer, responder, remediar o recuperar. Debe escribirse la definición operacional antes de compararla.</a:t>
+            </a:r>
+          </a:p>
+          <a:p>
+            <a:pPr>
+              <a:spcAft>
+                <a:spcPts val="600"/>
+              </a:spcAft>
+            </a:pPr>
+            <a:r>
+              <a:rPr sz="1500">
+                <a:solidFill>
+                  <a:srgbClr val="22282E"/>
+                </a:solidFill>
+              </a:rPr>
+              <a:t>•  Dwell time: intervalo estimado entre el inicio de una intrusión y su detección en incidentes donde ambos momentos pueden establecerse; no representa los incidentes nunca descubiertos.</a:t>
             </a:r>
           </a:p>
         </p:txBody>
@@ -4614,7 +5305,7 @@
                   <a:srgbClr val="0B3D2E"/>
                 </a:solidFill>
               </a:rPr>
-              <a:t>✍️ Ejercicios</a:t>
+              <a:t>🔍 Caso resuelto — de una alerta a una decisión</a:t>
             </a:r>
           </a:p>
         </p:txBody>
@@ -4652,82 +5343,97 @@
                   <a:srgbClr val="22282E"/>
                 </a:solidFill>
               </a:rPr>
-              <a:t>•  Escribe la descripción de puesto (3 responsabilidades) de un analista L1 y de un ingeniero de detección.</a:t>
-            </a:r>
-          </a:p>
-          <a:p>
-            <a:pPr>
-              <a:spcAft>
-                <a:spcPts val="600"/>
-              </a:spcAft>
-            </a:pPr>
-            <a:r>
-              <a:rPr sz="1500">
-                <a:solidFill>
-                  <a:srgbClr val="22282E"/>
-                </a:solidFill>
-              </a:rPr>
-              <a:t>•  Redacta el runbook de 6 pasos para una alerta de "inicio de sesión imposible" (geografía incompatible).</a:t>
-            </a:r>
-          </a:p>
-          <a:p>
-            <a:pPr>
-              <a:spcAft>
-                <a:spcPts val="600"/>
-              </a:spcAft>
-            </a:pPr>
-            <a:r>
-              <a:rPr sz="1500">
-                <a:solidFill>
-                  <a:srgbClr val="22282E"/>
-                </a:solidFill>
-              </a:rPr>
-              <a:t>•  Compara MTTD y dwell time con un ejemplo numérico propio.</a:t>
-            </a:r>
-          </a:p>
-          <a:p>
-            <a:pPr>
-              <a:spcAft>
-                <a:spcPts val="600"/>
-              </a:spcAft>
-            </a:pPr>
-            <a:r>
-              <a:rPr sz="1500">
-                <a:solidFill>
-                  <a:srgbClr val="22282E"/>
-                </a:solidFill>
-              </a:rPr>
-              <a:t>•  Diseña el criterio de escalado L1→L2 con 3 condiciones objetivas.</a:t>
-            </a:r>
-          </a:p>
-          <a:p>
-            <a:pPr>
-              <a:spcAft>
-                <a:spcPts val="600"/>
-              </a:spcAft>
-            </a:pPr>
-            <a:r>
-              <a:rPr sz="1500">
-                <a:solidFill>
-                  <a:srgbClr val="22282E"/>
-                </a:solidFill>
-              </a:rPr>
-              <a:t>•  Argumenta cuándo un MSSP es mala idea para una organización concreta.</a:t>
-            </a:r>
-          </a:p>
-          <a:p>
-            <a:pPr>
-              <a:spcAft>
-                <a:spcPts val="600"/>
-              </a:spcAft>
-            </a:pPr>
-            <a:r>
-              <a:rPr sz="1500">
-                <a:solidFill>
-                  <a:srgbClr val="22282E"/>
-                </a:solidFill>
-              </a:rPr>
-              <a:t>•  Propón una métrica que un mal SOC podría manipular y explica cómo evitar el gaming.</a:t>
+              <a:t>•  El SIEM genera una alerta porque WINWORD.EXE inició powershell.exe en el portátil de la directora financiera. La severidad inicial es alta por criticidad del activo, pero todavía no existe un…</a:t>
+            </a:r>
+          </a:p>
+          <a:p>
+            <a:pPr>
+              <a:spcAft>
+                <a:spcPts val="600"/>
+              </a:spcAft>
+            </a:pPr>
+            <a:r>
+              <a:rPr sz="1500">
+                <a:solidFill>
+                  <a:srgbClr val="22282E"/>
+                </a:solidFill>
+              </a:rPr>
+              <a:t>•  L1 valida la señal. Confirma host, usuario, hora y que los eventos no estén duplicados. Revisa proceso padre, línea de comandos y fuente del documento. Encuentra -EncodedCommand y una conexión…</a:t>
+            </a:r>
+          </a:p>
+          <a:p>
+            <a:pPr>
+              <a:spcAft>
+                <a:spcPts val="600"/>
+              </a:spcAft>
+            </a:pPr>
+            <a:r>
+              <a:rPr sz="1500">
+                <a:solidFill>
+                  <a:srgbClr val="22282E"/>
+                </a:solidFill>
+              </a:rPr>
+              <a:t>•  L1 escala con contexto. Entrega IDs de eventos, consulta utilizada, documento, hash, dominio, criticidad y ventana investigada. Formula la pregunta pendiente: determinar alcance y persistencia.</a:t>
+            </a:r>
+          </a:p>
+          <a:p>
+            <a:pPr>
+              <a:spcAft>
+                <a:spcPts val="600"/>
+              </a:spcAft>
+            </a:pPr>
+            <a:r>
+              <a:rPr sz="1500">
+                <a:solidFill>
+                  <a:srgbClr val="22282E"/>
+                </a:solidFill>
+              </a:rPr>
+              <a:t>•  L2 amplía el alcance. Busca el mismo hash, dominio y patrón padre-hijo en la flota; revisa identidad y correo. Encuentra el mensaje en tres buzones, pero ejecución solo en un host. Clasifica el caso…</a:t>
+            </a:r>
+          </a:p>
+          <a:p>
+            <a:pPr>
+              <a:spcAft>
+                <a:spcPts val="600"/>
+              </a:spcAft>
+            </a:pPr>
+            <a:r>
+              <a:rPr sz="1500">
+                <a:solidFill>
+                  <a:srgbClr val="22282E"/>
+                </a:solidFill>
+              </a:rPr>
+              <a:t>•  Incident response decide contención. Se aísla el portátil y se revocan sesiones de la cuenta con autorización registrada. Antes se preservan los artefactos volátiles definidos por el playbook.</a:t>
+            </a:r>
+          </a:p>
+          <a:p>
+            <a:pPr>
+              <a:spcAft>
+                <a:spcPts val="600"/>
+              </a:spcAft>
+            </a:pPr>
+            <a:r>
+              <a:rPr sz="1500">
+                <a:solidFill>
+                  <a:srgbClr val="22282E"/>
+                </a:solidFill>
+              </a:rPr>
+              <a:t>•  L3 y detección cierran el bucle. Analizan el payload, afinan la regla con la relación Office–intérprete–red y crean una búsqueda retrospectiva. El cierre incluye alcance, acciones, evidencia…</a:t>
+            </a:r>
+          </a:p>
+          <a:p>
+            <a:pPr>
+              <a:spcAft>
+                <a:spcPts val="600"/>
+              </a:spcAft>
+            </a:pPr>
+            <a:r>
+              <a:rPr sz="1500">
+                <a:solidFill>
+                  <a:srgbClr val="22282E"/>
+                </a:solidFill>
+              </a:rPr>
+              <a:t>•  La enseñanza no es que cada alerta siga exactamente esos cargos. Es que cada transición agrega evidencia y cambia una decisión. Si L1 hubiera reenviado solo el nombre de la regla, L2 repetiría…</a:t>
             </a:r>
           </a:p>
         </p:txBody>
@@ -4778,7 +5484,7 @@
                   <a:srgbClr val="0B3D2E"/>
                 </a:solidFill>
               </a:rPr>
-              <a:t>📝 Reto verificable</a:t>
+              <a:t>✅ Evidencias de aprendizaje</a:t>
             </a:r>
           </a:p>
         </p:txBody>
@@ -4816,7 +5522,7 @@
                   <a:srgbClr val="22282E"/>
                 </a:solidFill>
               </a:rPr>
-              <a:t>•  Entrega un documento de 1–2 páginas con: (a) organigrama del SOC con roles, (b) diagrama del ciclo de vida de la alerta, (c) matriz RACI, (d) 4 métricas con su fórmula. Criterio de aceptación: el flujo de alerta muestra al menos un punto de escalado y un punto de cierre con documentación, y cada rol del organigrama aparece como "Responsible" de al menos una actividad en la RACI.</a:t>
+              <a:t>•  El alumno demuestra comprensión cuando puede entregar un flujo donde cada rol tiene una decisión, una entrada y una salida; distingue alerta, caso e incidente; define los relojes de sus métricas; y…</a:t>
             </a:r>
           </a:p>
         </p:txBody>
